--- a/catalog/samples/small_multiples.pptx
+++ b/catalog/samples/small_multiples.pptx
@@ -2792,7 +2792,7 @@
           </a:p>
           <a:p>
             <a:r>
-              <a:t>  "template_sha256": "5916736effb33787f35bb69b0c3bee9f93756d57356921b7ab54d7661124a611"</a:t>
+              <a:t>  "template_sha256": "c07fe65b47f6281223412729b0d5f18d1dc892e2769573e2139dd281f0a9c5ca"</a:t>
             </a:r>
           </a:p>
           <a:p>
